--- a/docs/DID_Hack_IKA_Защита_прототипа.pptx
+++ b/docs/DID_Hack_IKA_Защита_прототипа.pptx
@@ -119,13 +119,13 @@
   <p:extLst>
     <p:ext uri="{521415D9-36F7-43E2-AB2F-B90AF26B5E84}">
       <p14:sectionLst xmlns:p14="http://schemas.microsoft.com/office/powerpoint/2010/main">
-        <p14:section name="Задача" id="{0484e517-f2a3-7c8f-f2e3-26e9604db498}">
+        <p14:section name="Задача" id="{3cb27059-51fb-278a-f169-a01b6175f5ca}">
           <p14:sldIdLst>
             <p14:sldId id="256"/>
             <p14:sldId id="257"/>
           </p14:sldIdLst>
         </p14:section>
-        <p14:section name="Решение" id="{23d42d0d-4f9d-d0d9-6c62-b6ac7e73c42c}">
+        <p14:section name="Решение" id="{a6be0b74-9bd5-10ba-adec-4d20a9d56de1}">
           <p14:sldIdLst>
             <p14:sldId id="258"/>
             <p14:sldId id="259"/>
@@ -135,14 +135,14 @@
             <p14:sldId id="263"/>
           </p14:sldIdLst>
         </p14:section>
-        <p14:section name="Результаты" id="{416e8337-0bcd-efb8-36d9-7427211e4559}">
+        <p14:section name="Результаты" id="{33a998fe-5452-450f-19d8-f78fd0f46b89}">
           <p14:sldIdLst>
             <p14:sldId id="264"/>
             <p14:sldId id="265"/>
             <p14:sldId id="266"/>
           </p14:sldIdLst>
         </p14:section>
-        <p14:section name="Процесс" id="{974b5bdd-7833-56eb-011f-fa67de4f64b7}">
+        <p14:section name="Процесс" id="{a768eec3-9988-72b5-7612-1be1cc9e3bc8}">
           <p14:sldIdLst>
             <p14:sldId id="267"/>
             <p14:sldId id="268"/>
@@ -4275,7 +4275,7 @@
                 <a:ea typeface="Arial" pitchFamily="34" charset="-122"/>
                 <a:cs typeface="Arial" pitchFamily="34" charset="-120"/>
               </a:rPr>
-              <a:t>14</a:t>
+              <a:t>15</a:t>
             </a:r>
             <a:endParaRPr lang="en-US" sz="3600" dirty="0"/>
           </a:p>
